--- a/Technomantic_Coding_Workshop.pptx
+++ b/Technomantic_Coding_Workshop.pptx
@@ -122,6 +122,9 @@
   <p:extLst>
     <p:ext uri="{EFAFB233-063F-42B5-8137-9DF3F51BA10A}">
       <p15:sldGuideLst xmlns:p15="http://schemas.microsoft.com/office/powerpoint/2012/main"/>
+    </p:ext>
+    <p:ext uri="{2D200454-40CA-4A62-9FC3-DE9A4176ACB9}">
+      <p15:notesGuideLst xmlns:p15="http://schemas.microsoft.com/office/powerpoint/2012/main"/>
     </p:ext>
   </p:extLst>
 </p:presentation>
@@ -9521,7 +9524,7 @@
                 <a:ea typeface="Calibri" pitchFamily="34" charset="-122"/>
                 <a:cs typeface="Calibri" pitchFamily="34" charset="-120"/>
               </a:rPr>
-              <a:t>An utterance of symbolic language that produces an effect.</a:t>
+              <a:t>An “utterance” of symbolic language (verbal or otherwise) that produces an effect.</a:t>
             </a:r>
             <a:endParaRPr lang="en-US" sz="1200" dirty="0"/>
           </a:p>

--- a/Technomantic_Coding_Workshop.pptx
+++ b/Technomantic_Coding_Workshop.pptx
@@ -1993,7 +1993,7 @@
         </p:nvSpPr>
         <p:spPr>
           <a:xfrm>
-            <a:off x="731520" y="1097280"/>
+            <a:off x="731520" y="-43482"/>
             <a:ext cx="7680960" cy="2194560"/>
           </a:xfrm>
           <a:prstGeom prst="rect">
@@ -2055,8 +2055,8 @@
         </p:nvSpPr>
         <p:spPr>
           <a:xfrm>
-            <a:off x="731520" y="3291840"/>
-            <a:ext cx="7680960" cy="548640"/>
+            <a:off x="731520" y="3279140"/>
+            <a:ext cx="7680960" cy="1028432"/>
           </a:xfrm>
           <a:prstGeom prst="rect">
             <a:avLst/>
@@ -2082,7 +2082,61 @@
               </a:rPr>
               <a:t>Magic &amp; Technology // Computation as Ritual</a:t>
             </a:r>
-            <a:endParaRPr lang="en-US" sz="1800" dirty="0"/>
+          </a:p>
+          <a:p>
+            <a:pPr marL="0" indent="0">
+              <a:buNone/>
+            </a:pPr>
+            <a:endParaRPr lang="en-US" i="1" dirty="0">
+              <a:solidFill>
+                <a:srgbClr val="777777"/>
+              </a:solidFill>
+              <a:latin typeface="Calibri" pitchFamily="34" charset="0"/>
+              <a:cs typeface="Calibri" pitchFamily="34" charset="-120"/>
+            </a:endParaRPr>
+          </a:p>
+          <a:p>
+            <a:pPr marL="0" indent="0">
+              <a:buNone/>
+            </a:pPr>
+            <a:r>
+              <a:rPr lang="en-US" sz="1800" i="1" dirty="0" err="1">
+                <a:solidFill>
+                  <a:srgbClr val="777777"/>
+                </a:solidFill>
+                <a:latin typeface="Calibri" pitchFamily="34" charset="0"/>
+                <a:cs typeface="Calibri" pitchFamily="34" charset="-120"/>
+              </a:rPr>
+              <a:t>Github</a:t>
+            </a:r>
+            <a:r>
+              <a:rPr lang="en-US" sz="1800" i="1" dirty="0">
+                <a:solidFill>
+                  <a:srgbClr val="777777"/>
+                </a:solidFill>
+                <a:latin typeface="Calibri" pitchFamily="34" charset="0"/>
+                <a:cs typeface="Calibri" pitchFamily="34" charset="-120"/>
+              </a:rPr>
+              <a:t> repo: </a:t>
+            </a:r>
+            <a:r>
+              <a:rPr lang="en-US" sz="1800" i="1" dirty="0">
+                <a:solidFill>
+                  <a:srgbClr val="777777"/>
+                </a:solidFill>
+                <a:latin typeface="Calibri" pitchFamily="34" charset="0"/>
+                <a:cs typeface="Calibri" pitchFamily="34" charset="-120"/>
+                <a:hlinkClick r:id="rId3"/>
+              </a:rPr>
+              <a:t>https://github.com/aperry2/technomanticCodingWorkshop</a:t>
+            </a:r>
+            <a:endParaRPr lang="en-US" sz="1800" i="1" dirty="0">
+              <a:solidFill>
+                <a:srgbClr val="777777"/>
+              </a:solidFill>
+              <a:latin typeface="Calibri" pitchFamily="34" charset="0"/>
+              <a:cs typeface="Calibri" pitchFamily="34" charset="-120"/>
+            </a:endParaRPr>
           </a:p>
         </p:txBody>
       </p:sp>
@@ -2191,6 +2245,36 @@
           </a:p>
         </p:txBody>
       </p:sp>
+      <p:pic>
+        <p:nvPicPr>
+          <p:cNvPr id="9" name="Picture 8" descr="A qr code on a white background&#10;&#10;Description automatically generated">
+            <a:extLst>
+              <a:ext uri="{FF2B5EF4-FFF2-40B4-BE49-F238E27FC236}">
+                <a16:creationId xmlns:a16="http://schemas.microsoft.com/office/drawing/2014/main" id="{3A779534-D8E9-B994-6CED-F7E5C02369D7}"/>
+              </a:ext>
+            </a:extLst>
+          </p:cNvPr>
+          <p:cNvPicPr>
+            <a:picLocks noChangeAspect="1"/>
+          </p:cNvPicPr>
+          <p:nvPr/>
+        </p:nvPicPr>
+        <p:blipFill>
+          <a:blip r:embed="rId4"/>
+          <a:stretch>
+            <a:fillRect/>
+          </a:stretch>
+        </p:blipFill>
+        <p:spPr>
+          <a:xfrm>
+            <a:off x="6532880" y="1913756"/>
+            <a:ext cx="1879600" cy="1879600"/>
+          </a:xfrm>
+          <a:prstGeom prst="rect">
+            <a:avLst/>
+          </a:prstGeom>
+        </p:spPr>
+      </p:pic>
     </p:spTree>
   </p:cSld>
   <p:clrMapOvr>

--- a/Technomantic_Coding_Workshop.pptx
+++ b/Technomantic_Coding_Workshop.pptx
@@ -2055,8 +2055,8 @@
         </p:nvSpPr>
         <p:spPr>
           <a:xfrm>
-            <a:off x="731520" y="3279140"/>
-            <a:ext cx="7680960" cy="1028432"/>
+            <a:off x="731520" y="4009970"/>
+            <a:ext cx="7680960" cy="649972"/>
           </a:xfrm>
           <a:prstGeom prst="rect">
             <a:avLst/>
@@ -2082,11 +2082,6 @@
               </a:rPr>
               <a:t>Magic &amp; Technology // Computation as Ritual</a:t>
             </a:r>
-          </a:p>
-          <a:p>
-            <a:pPr marL="0" indent="0">
-              <a:buNone/>
-            </a:pPr>
             <a:endParaRPr lang="en-US" i="1" dirty="0">
               <a:solidFill>
                 <a:srgbClr val="777777"/>
@@ -2267,7 +2262,7 @@
         </p:blipFill>
         <p:spPr>
           <a:xfrm>
-            <a:off x="6532880" y="1913756"/>
+            <a:off x="801858" y="1883864"/>
             <a:ext cx="1879600" cy="1879600"/>
           </a:xfrm>
           <a:prstGeom prst="rect">
@@ -2275,6 +2270,144 @@
           </a:prstGeom>
         </p:spPr>
       </p:pic>
+      <p:pic>
+        <p:nvPicPr>
+          <p:cNvPr id="12" name="Picture 11" descr="A qr code on a white background&#10;&#10;Description automatically generated">
+            <a:extLst>
+              <a:ext uri="{FF2B5EF4-FFF2-40B4-BE49-F238E27FC236}">
+                <a16:creationId xmlns:a16="http://schemas.microsoft.com/office/drawing/2014/main" id="{31A7AC53-399D-5B32-EE8A-3DE840DB31AE}"/>
+              </a:ext>
+            </a:extLst>
+          </p:cNvPr>
+          <p:cNvPicPr>
+            <a:picLocks noChangeAspect="1"/>
+          </p:cNvPicPr>
+          <p:nvPr/>
+        </p:nvPicPr>
+        <p:blipFill>
+          <a:blip r:embed="rId5"/>
+          <a:stretch>
+            <a:fillRect/>
+          </a:stretch>
+        </p:blipFill>
+        <p:spPr>
+          <a:xfrm>
+            <a:off x="6462544" y="1883864"/>
+            <a:ext cx="1879600" cy="1879600"/>
+          </a:xfrm>
+          <a:prstGeom prst="rect">
+            <a:avLst/>
+          </a:prstGeom>
+        </p:spPr>
+      </p:pic>
+      <p:sp>
+        <p:nvSpPr>
+          <p:cNvPr id="14" name="Text 2">
+            <a:extLst>
+              <a:ext uri="{FF2B5EF4-FFF2-40B4-BE49-F238E27FC236}">
+                <a16:creationId xmlns:a16="http://schemas.microsoft.com/office/drawing/2014/main" id="{0EAB30E3-094D-C542-51D9-A491029683DD}"/>
+              </a:ext>
+            </a:extLst>
+          </p:cNvPr>
+          <p:cNvSpPr/>
+          <p:nvPr/>
+        </p:nvSpPr>
+        <p:spPr>
+          <a:xfrm>
+            <a:off x="2751796" y="3436535"/>
+            <a:ext cx="1267545" cy="341429"/>
+          </a:xfrm>
+          <a:prstGeom prst="rect">
+            <a:avLst/>
+          </a:prstGeom>
+          <a:noFill/>
+          <a:ln/>
+        </p:spPr>
+        <p:txBody>
+          <a:bodyPr wrap="square" rtlCol="0" anchor="ctr"/>
+          <a:lstStyle/>
+          <a:p>
+            <a:pPr marL="0" indent="0">
+              <a:buNone/>
+            </a:pPr>
+            <a:r>
+              <a:rPr lang="en-US" i="1" dirty="0">
+                <a:solidFill>
+                  <a:srgbClr val="777777"/>
+                </a:solidFill>
+                <a:latin typeface="Calibri" pitchFamily="34" charset="0"/>
+                <a:cs typeface="Calibri" pitchFamily="34" charset="-120"/>
+              </a:rPr>
+              <a:t>&lt;- GITHUB</a:t>
+            </a:r>
+            <a:endParaRPr lang="en-US" sz="1800" i="1" dirty="0">
+              <a:solidFill>
+                <a:srgbClr val="777777"/>
+              </a:solidFill>
+              <a:latin typeface="Calibri" pitchFamily="34" charset="0"/>
+              <a:cs typeface="Calibri" pitchFamily="34" charset="-120"/>
+            </a:endParaRPr>
+          </a:p>
+        </p:txBody>
+      </p:sp>
+      <p:sp>
+        <p:nvSpPr>
+          <p:cNvPr id="16" name="Text 2">
+            <a:extLst>
+              <a:ext uri="{FF2B5EF4-FFF2-40B4-BE49-F238E27FC236}">
+                <a16:creationId xmlns:a16="http://schemas.microsoft.com/office/drawing/2014/main" id="{8D776AD3-E096-0390-49DA-40F85377339F}"/>
+              </a:ext>
+            </a:extLst>
+          </p:cNvPr>
+          <p:cNvSpPr/>
+          <p:nvPr/>
+        </p:nvSpPr>
+        <p:spPr>
+          <a:xfrm>
+            <a:off x="5097251" y="1838011"/>
+            <a:ext cx="1267545" cy="710186"/>
+          </a:xfrm>
+          <a:prstGeom prst="rect">
+            <a:avLst/>
+          </a:prstGeom>
+          <a:noFill/>
+          <a:ln/>
+        </p:spPr>
+        <p:txBody>
+          <a:bodyPr wrap="square" rtlCol="0" anchor="ctr"/>
+          <a:lstStyle/>
+          <a:p>
+            <a:pPr marL="0" indent="0" algn="r">
+              <a:buNone/>
+            </a:pPr>
+            <a:r>
+              <a:rPr lang="en-US" i="1" dirty="0">
+                <a:solidFill>
+                  <a:srgbClr val="777777"/>
+                </a:solidFill>
+                <a:latin typeface="Calibri" pitchFamily="34" charset="0"/>
+                <a:cs typeface="Calibri" pitchFamily="34" charset="-120"/>
+              </a:rPr>
+              <a:t>BUSINESS</a:t>
+            </a:r>
+          </a:p>
+          <a:p>
+            <a:pPr marL="0" indent="0" algn="r">
+              <a:buNone/>
+            </a:pPr>
+            <a:r>
+              <a:rPr lang="en-US" sz="1800" i="1" dirty="0">
+                <a:solidFill>
+                  <a:srgbClr val="777777"/>
+                </a:solidFill>
+                <a:latin typeface="Calibri" pitchFamily="34" charset="0"/>
+                <a:cs typeface="Calibri" pitchFamily="34" charset="-120"/>
+              </a:rPr>
+              <a:t>CARD -&gt;</a:t>
+            </a:r>
+          </a:p>
+        </p:txBody>
+      </p:sp>
     </p:spTree>
   </p:cSld>
   <p:clrMapOvr>
@@ -6005,7 +6138,7 @@
         </p:nvSpPr>
         <p:spPr>
           <a:xfrm>
-            <a:off x="731520" y="1097280"/>
+            <a:off x="731520" y="1057088"/>
             <a:ext cx="3840480" cy="274320"/>
           </a:xfrm>
           <a:prstGeom prst="rect">
@@ -6044,7 +6177,7 @@
         </p:nvSpPr>
         <p:spPr>
           <a:xfrm>
-            <a:off x="731520" y="1508760"/>
+            <a:off x="731520" y="1358039"/>
             <a:ext cx="1463040" cy="320040"/>
           </a:xfrm>
           <a:prstGeom prst="rect">
@@ -6083,7 +6216,7 @@
         </p:nvSpPr>
         <p:spPr>
           <a:xfrm>
-            <a:off x="2286000" y="1508760"/>
+            <a:off x="2286000" y="1358039"/>
             <a:ext cx="2286000" cy="320040"/>
           </a:xfrm>
           <a:prstGeom prst="rect">
@@ -6122,7 +6255,7 @@
         </p:nvSpPr>
         <p:spPr>
           <a:xfrm>
-            <a:off x="731520" y="1920240"/>
+            <a:off x="731520" y="1769519"/>
             <a:ext cx="1463040" cy="320040"/>
           </a:xfrm>
           <a:prstGeom prst="rect">
@@ -6161,7 +6294,7 @@
         </p:nvSpPr>
         <p:spPr>
           <a:xfrm>
-            <a:off x="2286000" y="1920240"/>
+            <a:off x="2286000" y="1769519"/>
             <a:ext cx="2286000" cy="320040"/>
           </a:xfrm>
           <a:prstGeom prst="rect">
@@ -6200,7 +6333,7 @@
         </p:nvSpPr>
         <p:spPr>
           <a:xfrm>
-            <a:off x="731520" y="2331720"/>
+            <a:off x="731520" y="2180999"/>
             <a:ext cx="1463040" cy="320040"/>
           </a:xfrm>
           <a:prstGeom prst="rect">
@@ -6239,7 +6372,7 @@
         </p:nvSpPr>
         <p:spPr>
           <a:xfrm>
-            <a:off x="2286000" y="2331720"/>
+            <a:off x="2286000" y="2180999"/>
             <a:ext cx="2286000" cy="320040"/>
           </a:xfrm>
           <a:prstGeom prst="rect">
@@ -6278,7 +6411,7 @@
         </p:nvSpPr>
         <p:spPr>
           <a:xfrm>
-            <a:off x="731520" y="2743200"/>
+            <a:off x="731520" y="2592479"/>
             <a:ext cx="1463040" cy="320040"/>
           </a:xfrm>
           <a:prstGeom prst="rect">
@@ -6317,7 +6450,7 @@
         </p:nvSpPr>
         <p:spPr>
           <a:xfrm>
-            <a:off x="2286000" y="2743200"/>
+            <a:off x="2286000" y="2592479"/>
             <a:ext cx="2286000" cy="320040"/>
           </a:xfrm>
           <a:prstGeom prst="rect">
@@ -6356,7 +6489,7 @@
         </p:nvSpPr>
         <p:spPr>
           <a:xfrm>
-            <a:off x="731520" y="3154680"/>
+            <a:off x="731520" y="3003959"/>
             <a:ext cx="1463040" cy="320040"/>
           </a:xfrm>
           <a:prstGeom prst="rect">
@@ -6395,7 +6528,7 @@
         </p:nvSpPr>
         <p:spPr>
           <a:xfrm>
-            <a:off x="2286000" y="3154680"/>
+            <a:off x="2286000" y="3003959"/>
             <a:ext cx="2286000" cy="320040"/>
           </a:xfrm>
           <a:prstGeom prst="rect">
@@ -6434,7 +6567,7 @@
         </p:nvSpPr>
         <p:spPr>
           <a:xfrm>
-            <a:off x="731520" y="3566160"/>
+            <a:off x="731520" y="3415439"/>
             <a:ext cx="1463040" cy="320040"/>
           </a:xfrm>
           <a:prstGeom prst="rect">
@@ -6473,7 +6606,7 @@
         </p:nvSpPr>
         <p:spPr>
           <a:xfrm>
-            <a:off x="2286000" y="3566160"/>
+            <a:off x="2286000" y="3415439"/>
             <a:ext cx="2286000" cy="320040"/>
           </a:xfrm>
           <a:prstGeom prst="rect">
@@ -6512,7 +6645,7 @@
         </p:nvSpPr>
         <p:spPr>
           <a:xfrm>
-            <a:off x="731520" y="3977640"/>
+            <a:off x="731520" y="3826919"/>
             <a:ext cx="1463040" cy="320040"/>
           </a:xfrm>
           <a:prstGeom prst="rect">
@@ -6551,7 +6684,7 @@
         </p:nvSpPr>
         <p:spPr>
           <a:xfrm>
-            <a:off x="2286000" y="3977640"/>
+            <a:off x="2286000" y="3826919"/>
             <a:ext cx="2286000" cy="320040"/>
           </a:xfrm>
           <a:prstGeom prst="rect">
@@ -7381,6 +7514,95 @@
               <a:t>Radial zoom</a:t>
             </a:r>
             <a:endParaRPr lang="en-US" sz="1000" dirty="0"/>
+          </a:p>
+        </p:txBody>
+      </p:sp>
+      <p:sp>
+        <p:nvSpPr>
+          <p:cNvPr id="39" name="Text 14">
+            <a:extLst>
+              <a:ext uri="{FF2B5EF4-FFF2-40B4-BE49-F238E27FC236}">
+                <a16:creationId xmlns:a16="http://schemas.microsoft.com/office/drawing/2014/main" id="{9C866597-1BF8-019E-7499-42AC9288F7C1}"/>
+              </a:ext>
+            </a:extLst>
+          </p:cNvPr>
+          <p:cNvSpPr/>
+          <p:nvPr/>
+        </p:nvSpPr>
+        <p:spPr>
+          <a:xfrm>
+            <a:off x="731520" y="4225336"/>
+            <a:ext cx="1463040" cy="320040"/>
+          </a:xfrm>
+          <a:prstGeom prst="rect">
+            <a:avLst/>
+          </a:prstGeom>
+          <a:noFill/>
+          <a:ln/>
+        </p:spPr>
+        <p:txBody>
+          <a:bodyPr wrap="square" lIns="0" tIns="0" rIns="0" bIns="0" rtlCol="0" anchor="ctr"/>
+          <a:lstStyle/>
+          <a:p>
+            <a:pPr marL="0" indent="0">
+              <a:buNone/>
+            </a:pPr>
+            <a:r>
+              <a:rPr lang="en-US" sz="1100" b="1" dirty="0">
+                <a:solidFill>
+                  <a:srgbClr val="DD8855"/>
+                </a:solidFill>
+                <a:latin typeface="Consolas" pitchFamily="34" charset="0"/>
+                <a:cs typeface="Consolas" pitchFamily="34" charset="-120"/>
+              </a:rPr>
+              <a:t>t</a:t>
+            </a:r>
+            <a:endParaRPr lang="en-US" sz="1100" dirty="0"/>
+          </a:p>
+        </p:txBody>
+      </p:sp>
+      <p:sp>
+        <p:nvSpPr>
+          <p:cNvPr id="40" name="Text 15">
+            <a:extLst>
+              <a:ext uri="{FF2B5EF4-FFF2-40B4-BE49-F238E27FC236}">
+                <a16:creationId xmlns:a16="http://schemas.microsoft.com/office/drawing/2014/main" id="{DFAF5EEE-C133-0755-EA88-ECADD9EA888A}"/>
+              </a:ext>
+            </a:extLst>
+          </p:cNvPr>
+          <p:cNvSpPr/>
+          <p:nvPr/>
+        </p:nvSpPr>
+        <p:spPr>
+          <a:xfrm>
+            <a:off x="2286000" y="4238399"/>
+            <a:ext cx="2286000" cy="320040"/>
+          </a:xfrm>
+          <a:prstGeom prst="rect">
+            <a:avLst/>
+          </a:prstGeom>
+          <a:noFill/>
+          <a:ln/>
+        </p:spPr>
+        <p:txBody>
+          <a:bodyPr wrap="square" lIns="0" tIns="0" rIns="0" bIns="0" rtlCol="0" anchor="ctr"/>
+          <a:lstStyle/>
+          <a:p>
+            <a:pPr marL="0" indent="0">
+              <a:buNone/>
+            </a:pPr>
+            <a:r>
+              <a:rPr lang="en-US" sz="1100" dirty="0">
+                <a:solidFill>
+                  <a:srgbClr val="E8E8E8"/>
+                </a:solidFill>
+                <a:latin typeface="Calibri" pitchFamily="34" charset="0"/>
+                <a:ea typeface="Calibri" pitchFamily="34" charset="-122"/>
+                <a:cs typeface="Calibri" pitchFamily="34" charset="-120"/>
+              </a:rPr>
+              <a:t>Toggle HUD display</a:t>
+            </a:r>
+            <a:endParaRPr lang="en-US" sz="1100" dirty="0"/>
           </a:p>
         </p:txBody>
       </p:sp>

--- a/Technomantic_Coding_Workshop.pptx
+++ b/Technomantic_Coding_Workshop.pptx
@@ -8521,6 +8521,51 @@
               <a:t>TECHNOMANTIC CODING WORKSHOP</a:t>
             </a:r>
             <a:endParaRPr lang="en-US" sz="1100" dirty="0"/>
+          </a:p>
+        </p:txBody>
+      </p:sp>
+      <p:sp>
+        <p:nvSpPr>
+          <p:cNvPr id="10" name="Text 5">
+            <a:extLst>
+              <a:ext uri="{FF2B5EF4-FFF2-40B4-BE49-F238E27FC236}">
+                <a16:creationId xmlns:a16="http://schemas.microsoft.com/office/drawing/2014/main" id="{6CF2217C-79E9-3D15-DDC6-3EB654FD2764}"/>
+              </a:ext>
+            </a:extLst>
+          </p:cNvPr>
+          <p:cNvSpPr/>
+          <p:nvPr/>
+        </p:nvSpPr>
+        <p:spPr>
+          <a:xfrm>
+            <a:off x="731520" y="3566160"/>
+            <a:ext cx="7680960" cy="411480"/>
+          </a:xfrm>
+          <a:prstGeom prst="rect">
+            <a:avLst/>
+          </a:prstGeom>
+          <a:noFill/>
+          <a:ln/>
+        </p:spPr>
+        <p:txBody>
+          <a:bodyPr wrap="square" lIns="0" tIns="0" rIns="0" bIns="0" rtlCol="0" anchor="ctr"/>
+          <a:lstStyle/>
+          <a:p>
+            <a:pPr marL="0" indent="0">
+              <a:buNone/>
+            </a:pPr>
+            <a:r>
+              <a:rPr lang="en-US" sz="1400" i="1" dirty="0">
+                <a:solidFill>
+                  <a:srgbClr val="E8E8E8"/>
+                </a:solidFill>
+                <a:latin typeface="Calibri" pitchFamily="34" charset="0"/>
+                <a:ea typeface="Calibri" pitchFamily="34" charset="-122"/>
+                <a:cs typeface="Calibri" pitchFamily="34" charset="-120"/>
+              </a:rPr>
+              <a:t>Documents of Contemporary Art: Magic (2021)</a:t>
+            </a:r>
+            <a:endParaRPr lang="en-US" sz="1400" dirty="0"/>
           </a:p>
         </p:txBody>
       </p:sp>
